--- a/apps/resources/bundled_files/6-klass-turmushtuk-eseptoo-sabak.pptx
+++ b/apps/resources/bundled_files/6-klass-turmushtuk-eseptoo-sabak.pptx
@@ -5196,7 +5196,7 @@
                 </a:solidFill>
                 <a:latin typeface="PT Sans"/>
               </a:rPr>
-              <a:t>6-класс · Математика</a:t>
+              <a:t/>
             </a:r>
           </a:p>
         </p:txBody>
@@ -5688,7 +5688,7 @@
                 </a:solidFill>
                 <a:latin typeface="PT Sans"/>
               </a:rPr>
-              <a:t>6-класс ›</a:t>
+              <a:t/>
             </a:r>
           </a:p>
           <a:p>
@@ -6637,7 +6637,7 @@
                 </a:solidFill>
                 <a:latin typeface="PT Sans"/>
               </a:rPr>
-              <a:t>6-класс ›</a:t>
+              <a:t/>
             </a:r>
           </a:p>
           <a:p>
@@ -10222,7 +10222,7 @@
                 </a:solidFill>
                 <a:latin typeface="PT Sans"/>
               </a:rPr>
-              <a:t>6-класс ›</a:t>
+              <a:t/>
             </a:r>
           </a:p>
           <a:p>
@@ -12264,7 +12264,7 @@
                 </a:solidFill>
                 <a:latin typeface="PT Sans"/>
               </a:rPr>
-              <a:t>6-класс ›</a:t>
+              <a:t/>
             </a:r>
           </a:p>
           <a:p>
@@ -13847,7 +13847,7 @@
                 </a:solidFill>
                 <a:latin typeface="PT Sans"/>
               </a:rPr>
-              <a:t>6-класс ›</a:t>
+              <a:t/>
             </a:r>
           </a:p>
           <a:p>
@@ -14637,7 +14637,7 @@
                 </a:solidFill>
                 <a:latin typeface="PT Sans"/>
               </a:rPr>
-              <a:t>6-класс ›</a:t>
+              <a:t/>
             </a:r>
           </a:p>
           <a:p>
@@ -15466,7 +15466,7 @@
                 </a:solidFill>
                 <a:latin typeface="PT Sans"/>
               </a:rPr>
-              <a:t>6-класс ›</a:t>
+              <a:t/>
             </a:r>
           </a:p>
           <a:p>
@@ -17093,7 +17093,7 @@
                 </a:solidFill>
                 <a:latin typeface="PT Sans"/>
               </a:rPr>
-              <a:t>6-класс ›</a:t>
+              <a:t/>
             </a:r>
           </a:p>
           <a:p>
@@ -18177,7 +18177,7 @@
                 </a:solidFill>
                 <a:latin typeface="PT Sans"/>
               </a:rPr>
-              <a:t>6-класс ›</a:t>
+              <a:t/>
             </a:r>
           </a:p>
           <a:p>
@@ -19707,7 +19707,7 @@
                 </a:solidFill>
                 <a:latin typeface="PT Sans"/>
               </a:rPr>
-              <a:t>6-класс ›</a:t>
+              <a:t/>
             </a:r>
           </a:p>
           <a:p>
@@ -21829,7 +21829,7 @@
                 </a:solidFill>
                 <a:latin typeface="PT Sans"/>
               </a:rPr>
-              <a:t>6-класс ›</a:t>
+              <a:t/>
             </a:r>
           </a:p>
           <a:p>
@@ -23106,7 +23106,7 @@
                 </a:solidFill>
                 <a:latin typeface="PT Sans"/>
               </a:rPr>
-              <a:t>6-класс ›</a:t>
+              <a:t/>
             </a:r>
           </a:p>
           <a:p>
@@ -24534,7 +24534,7 @@
                 </a:solidFill>
                 <a:latin typeface="PT Sans"/>
               </a:rPr>
-              <a:t>6-класс ›</a:t>
+              <a:t/>
             </a:r>
           </a:p>
           <a:p>
@@ -25990,7 +25990,7 @@
                 </a:solidFill>
                 <a:latin typeface="PT Sans"/>
               </a:rPr>
-              <a:t>6-класс ›</a:t>
+              <a:t/>
             </a:r>
           </a:p>
           <a:p>
@@ -27033,7 +27033,7 @@
                 </a:solidFill>
                 <a:latin typeface="PT Sans"/>
               </a:rPr>
-              <a:t>6-класс ›</a:t>
+              <a:t/>
             </a:r>
           </a:p>
           <a:p>
@@ -27833,7 +27833,7 @@
                 </a:solidFill>
                 <a:latin typeface="PT Sans"/>
               </a:rPr>
-              <a:t>6-класс ›</a:t>
+              <a:t/>
             </a:r>
           </a:p>
           <a:p>
@@ -28674,7 +28674,7 @@
                 </a:solidFill>
                 <a:latin typeface="PT Sans"/>
               </a:rPr>
-              <a:t>6-класс ›</a:t>
+              <a:t/>
             </a:r>
           </a:p>
           <a:p>
@@ -29623,7 +29623,7 @@
                 </a:solidFill>
                 <a:latin typeface="PT Sans"/>
               </a:rPr>
-              <a:t>6-класс ›</a:t>
+              <a:t/>
             </a:r>
           </a:p>
           <a:p>
@@ -31077,7 +31077,7 @@
                 </a:solidFill>
                 <a:latin typeface="PT Sans"/>
               </a:rPr>
-              <a:t>6-класс ›</a:t>
+              <a:t/>
             </a:r>
           </a:p>
           <a:p>
@@ -31823,7 +31823,7 @@
                 </a:solidFill>
                 <a:latin typeface="PT Sans"/>
               </a:rPr>
-              <a:t>6-класс ›</a:t>
+              <a:t/>
             </a:r>
           </a:p>
           <a:p>
@@ -32631,7 +32631,7 @@
                 </a:solidFill>
                 <a:latin typeface="PT Sans"/>
               </a:rPr>
-              <a:t>6-класс ›</a:t>
+              <a:t/>
             </a:r>
           </a:p>
           <a:p>
@@ -33822,7 +33822,7 @@
                 </a:solidFill>
                 <a:latin typeface="PT Sans"/>
               </a:rPr>
-              <a:t>6-класс ›</a:t>
+              <a:t/>
             </a:r>
           </a:p>
           <a:p>
@@ -35001,7 +35001,7 @@
                 </a:solidFill>
                 <a:latin typeface="PT Sans"/>
               </a:rPr>
-              <a:t>6-класс ›</a:t>
+              <a:t/>
             </a:r>
           </a:p>
           <a:p>
@@ -35182,7 +35182,7 @@
                 </a:solidFill>
                 <a:latin typeface="PT Sans"/>
               </a:rPr>
-              <a:t>4-класс</a:t>
+              <a:t/>
             </a:r>
           </a:p>
         </p:txBody>
@@ -35362,7 +35362,7 @@
                 </a:solidFill>
                 <a:latin typeface="PT Sans"/>
               </a:rPr>
-              <a:t>5-класс</a:t>
+              <a:t/>
             </a:r>
           </a:p>
         </p:txBody>
@@ -35542,7 +35542,7 @@
                 </a:solidFill>
                 <a:latin typeface="PT Sans"/>
               </a:rPr>
-              <a:t>6-класс</a:t>
+              <a:t/>
             </a:r>
           </a:p>
         </p:txBody>
@@ -35778,7 +35778,7 @@
                 </a:solidFill>
                 <a:latin typeface="PT Sans"/>
               </a:rPr>
-              <a:t>7-класс</a:t>
+              <a:t/>
             </a:r>
           </a:p>
         </p:txBody>
@@ -36198,7 +36198,7 @@
                 </a:solidFill>
                 <a:latin typeface="PT Sans"/>
               </a:rPr>
-              <a:t>6-класс ›</a:t>
+              <a:t/>
             </a:r>
           </a:p>
           <a:p>
@@ -37346,7 +37346,7 @@
                 </a:solidFill>
                 <a:latin typeface="PT Sans"/>
               </a:rPr>
-              <a:t>6-класс ›</a:t>
+              <a:t/>
             </a:r>
           </a:p>
           <a:p>

--- a/apps/resources/bundled_files/6-klass-turmushtuk-eseptoo-sabak.pptx
+++ b/apps/resources/bundled_files/6-klass-turmushtuk-eseptoo-sabak.pptx
@@ -1582,7 +1582,7 @@
           <a:lstStyle/>
           <a:p>
             <a:r>
-              <a:t>Ой жүгүртүү маданияты (Wenxi Lee, 2.6).</a:t>
+              <a:t>Ой жүгүртүү маданияты (Wenxi Lee, 2,6).</a:t>
             </a:r>
           </a:p>
         </p:txBody>
